--- a/CalendarioAgo26/Ejercicios/E13_NAT/Ejercicio13.pptx
+++ b/CalendarioAgo26/Ejercicios/E13_NAT/Ejercicio13.pptx
@@ -141,22 +141,22 @@
   <pc:docChgLst>
     <pc:chgData name="Lizethe Pérez Fuertes" userId="4ae9ef87-2a7d-42f8-8dfa-0a501a9e2ff4" providerId="ADAL" clId="{FDDD45CB-1330-4033-A842-3D2746AFF7C7}"/>
     <pc:docChg chg="modSld">
-      <pc:chgData name="Lizethe Pérez Fuertes" userId="4ae9ef87-2a7d-42f8-8dfa-0a501a9e2ff4" providerId="ADAL" clId="{FDDD45CB-1330-4033-A842-3D2746AFF7C7}" dt="2025-11-12T15:21:46.952" v="1" actId="1076"/>
+      <pc:chgData name="Lizethe Pérez Fuertes" userId="4ae9ef87-2a7d-42f8-8dfa-0a501a9e2ff4" providerId="ADAL" clId="{FDDD45CB-1330-4033-A842-3D2746AFF7C7}" dt="2026-04-22T00:00:34.117" v="2" actId="1036"/>
       <pc:docMkLst>
         <pc:docMk/>
       </pc:docMkLst>
       <pc:sldChg chg="modSp mod">
-        <pc:chgData name="Lizethe Pérez Fuertes" userId="4ae9ef87-2a7d-42f8-8dfa-0a501a9e2ff4" providerId="ADAL" clId="{FDDD45CB-1330-4033-A842-3D2746AFF7C7}" dt="2025-11-12T15:21:46.952" v="1" actId="1076"/>
+        <pc:chgData name="Lizethe Pérez Fuertes" userId="4ae9ef87-2a7d-42f8-8dfa-0a501a9e2ff4" providerId="ADAL" clId="{FDDD45CB-1330-4033-A842-3D2746AFF7C7}" dt="2026-04-22T00:00:34.117" v="2" actId="1036"/>
         <pc:sldMkLst>
           <pc:docMk/>
-          <pc:sldMk cId="1223009868" sldId="346"/>
+          <pc:sldMk cId="698026624" sldId="332"/>
         </pc:sldMkLst>
         <pc:picChg chg="mod">
-          <ac:chgData name="Lizethe Pérez Fuertes" userId="4ae9ef87-2a7d-42f8-8dfa-0a501a9e2ff4" providerId="ADAL" clId="{FDDD45CB-1330-4033-A842-3D2746AFF7C7}" dt="2025-11-12T15:21:46.952" v="1" actId="1076"/>
+          <ac:chgData name="Lizethe Pérez Fuertes" userId="4ae9ef87-2a7d-42f8-8dfa-0a501a9e2ff4" providerId="ADAL" clId="{FDDD45CB-1330-4033-A842-3D2746AFF7C7}" dt="2026-04-22T00:00:34.117" v="2" actId="1036"/>
           <ac:picMkLst>
             <pc:docMk/>
-            <pc:sldMk cId="1223009868" sldId="346"/>
-            <ac:picMk id="3" creationId="{0000CABD-1879-6B76-9FB2-78ACB6816D16}"/>
+            <pc:sldMk cId="698026624" sldId="332"/>
+            <ac:picMk id="3" creationId="{D491D34C-D7D2-6BDB-F3D9-FAD1450DC0F0}"/>
           </ac:picMkLst>
         </pc:picChg>
       </pc:sldChg>
@@ -247,7 +247,7 @@
           <a:p>
             <a:fld id="{2D445F07-8756-451B-A938-0248325FC7BB}" type="datetimeFigureOut">
               <a:rPr lang="es-MX" smtClean="0"/>
-              <a:t>12/11/2025</a:t>
+              <a:t>21/04/2026</a:t>
             </a:fld>
             <a:endParaRPr lang="es-MX" dirty="0"/>
           </a:p>
@@ -864,7 +864,7 @@
           <a:p>
             <a:fld id="{5E75A0DC-66C6-4CEC-A5EB-F8C97CEC3796}" type="datetimeFigureOut">
               <a:rPr lang="es-MX" smtClean="0"/>
-              <a:t>12/11/2025</a:t>
+              <a:t>21/04/2026</a:t>
             </a:fld>
             <a:endParaRPr lang="es-MX" dirty="0"/>
           </a:p>
@@ -1034,7 +1034,7 @@
           <a:p>
             <a:fld id="{5E75A0DC-66C6-4CEC-A5EB-F8C97CEC3796}" type="datetimeFigureOut">
               <a:rPr lang="es-MX" smtClean="0"/>
-              <a:t>12/11/2025</a:t>
+              <a:t>21/04/2026</a:t>
             </a:fld>
             <a:endParaRPr lang="es-MX" dirty="0"/>
           </a:p>
@@ -1214,7 +1214,7 @@
           <a:p>
             <a:fld id="{5E75A0DC-66C6-4CEC-A5EB-F8C97CEC3796}" type="datetimeFigureOut">
               <a:rPr lang="es-MX" smtClean="0"/>
-              <a:t>12/11/2025</a:t>
+              <a:t>21/04/2026</a:t>
             </a:fld>
             <a:endParaRPr lang="es-MX" dirty="0"/>
           </a:p>
@@ -1384,7 +1384,7 @@
           <a:p>
             <a:fld id="{5E75A0DC-66C6-4CEC-A5EB-F8C97CEC3796}" type="datetimeFigureOut">
               <a:rPr lang="es-MX" smtClean="0"/>
-              <a:t>12/11/2025</a:t>
+              <a:t>21/04/2026</a:t>
             </a:fld>
             <a:endParaRPr lang="es-MX" dirty="0"/>
           </a:p>
@@ -1630,7 +1630,7 @@
           <a:p>
             <a:fld id="{5E75A0DC-66C6-4CEC-A5EB-F8C97CEC3796}" type="datetimeFigureOut">
               <a:rPr lang="es-MX" smtClean="0"/>
-              <a:t>12/11/2025</a:t>
+              <a:t>21/04/2026</a:t>
             </a:fld>
             <a:endParaRPr lang="es-MX" dirty="0"/>
           </a:p>
@@ -1918,7 +1918,7 @@
           <a:p>
             <a:fld id="{5E75A0DC-66C6-4CEC-A5EB-F8C97CEC3796}" type="datetimeFigureOut">
               <a:rPr lang="es-MX" smtClean="0"/>
-              <a:t>12/11/2025</a:t>
+              <a:t>21/04/2026</a:t>
             </a:fld>
             <a:endParaRPr lang="es-MX" dirty="0"/>
           </a:p>
@@ -2340,7 +2340,7 @@
           <a:p>
             <a:fld id="{5E75A0DC-66C6-4CEC-A5EB-F8C97CEC3796}" type="datetimeFigureOut">
               <a:rPr lang="es-MX" smtClean="0"/>
-              <a:t>12/11/2025</a:t>
+              <a:t>21/04/2026</a:t>
             </a:fld>
             <a:endParaRPr lang="es-MX" dirty="0"/>
           </a:p>
@@ -2458,7 +2458,7 @@
           <a:p>
             <a:fld id="{5E75A0DC-66C6-4CEC-A5EB-F8C97CEC3796}" type="datetimeFigureOut">
               <a:rPr lang="es-MX" smtClean="0"/>
-              <a:t>12/11/2025</a:t>
+              <a:t>21/04/2026</a:t>
             </a:fld>
             <a:endParaRPr lang="es-MX" dirty="0"/>
           </a:p>
@@ -2553,7 +2553,7 @@
           <a:p>
             <a:fld id="{5E75A0DC-66C6-4CEC-A5EB-F8C97CEC3796}" type="datetimeFigureOut">
               <a:rPr lang="es-MX" smtClean="0"/>
-              <a:t>12/11/2025</a:t>
+              <a:t>21/04/2026</a:t>
             </a:fld>
             <a:endParaRPr lang="es-MX" dirty="0"/>
           </a:p>
@@ -2830,7 +2830,7 @@
           <a:p>
             <a:fld id="{5E75A0DC-66C6-4CEC-A5EB-F8C97CEC3796}" type="datetimeFigureOut">
               <a:rPr lang="es-MX" smtClean="0"/>
-              <a:t>12/11/2025</a:t>
+              <a:t>21/04/2026</a:t>
             </a:fld>
             <a:endParaRPr lang="es-MX" dirty="0"/>
           </a:p>
@@ -3083,7 +3083,7 @@
           <a:p>
             <a:fld id="{5E75A0DC-66C6-4CEC-A5EB-F8C97CEC3796}" type="datetimeFigureOut">
               <a:rPr lang="es-MX" smtClean="0"/>
-              <a:t>12/11/2025</a:t>
+              <a:t>21/04/2026</a:t>
             </a:fld>
             <a:endParaRPr lang="es-MX" dirty="0"/>
           </a:p>
@@ -3296,7 +3296,7 @@
           <a:p>
             <a:fld id="{5E75A0DC-66C6-4CEC-A5EB-F8C97CEC3796}" type="datetimeFigureOut">
               <a:rPr lang="es-MX" smtClean="0"/>
-              <a:t>12/11/2025</a:t>
+              <a:t>21/04/2026</a:t>
             </a:fld>
             <a:endParaRPr lang="es-MX" dirty="0"/>
           </a:p>
@@ -6448,7 +6448,7 @@
         </p:blipFill>
         <p:spPr>
           <a:xfrm>
-            <a:off x="89756" y="2852936"/>
+            <a:off x="89756" y="2918268"/>
             <a:ext cx="8964488" cy="3031012"/>
           </a:xfrm>
           <a:prstGeom prst="rect">
